--- a/Bemutató 3.pptx
+++ b/Bemutató 3.pptx
@@ -231,7 +231,7 @@
             <a:pPr rtl="0"/>
             <a:fld id="{E3E210D5-DCF3-48C4-AFC2-E56A498A98F8}" type="datetime1">
               <a:rPr lang="hu-HU" smtClean="0"/>
-              <a:t>2026. 03. 15.</a:t>
+              <a:t>2026. 03. 16.</a:t>
             </a:fld>
             <a:endParaRPr lang="hu-HU"/>
           </a:p>
@@ -413,7 +413,7 @@
             <a:pPr rtl="0"/>
             <a:fld id="{3FB76F72-1760-48D0-8843-7277CDB3F293}" type="datetime1">
               <a:rPr lang="hu-HU" noProof="0" smtClean="0"/>
-              <a:t>2026. 03. 15.</a:t>
+              <a:t>2026. 03. 16.</a:t>
             </a:fld>
             <a:endParaRPr lang="hu-HU" noProof="0"/>
           </a:p>
@@ -921,7 +921,7 @@
           <a:p>
             <a:fld id="{12575099-B3AD-44D7-919B-BCB6DC3E7F21}" type="datetimeFigureOut">
               <a:rPr lang="en-US" dirty="0"/>
-              <a:t>3/15/2026</a:t>
+              <a:t>3/16/2026</a:t>
             </a:fld>
             <a:endParaRPr lang="en-US" dirty="0"/>
           </a:p>
@@ -1128,7 +1128,7 @@
           <a:p>
             <a:fld id="{F18115DA-6CBC-4AEF-A85F-371C66916CF8}" type="datetimeFigureOut">
               <a:rPr lang="en-US" dirty="0"/>
-              <a:t>3/15/2026</a:t>
+              <a:t>3/16/2026</a:t>
             </a:fld>
             <a:endParaRPr lang="en-US" dirty="0"/>
           </a:p>
@@ -1345,7 +1345,7 @@
           <a:p>
             <a:fld id="{2A6007E4-95E8-4ABC-B20B-51235318A487}" type="datetimeFigureOut">
               <a:rPr lang="en-US" dirty="0"/>
-              <a:t>3/15/2026</a:t>
+              <a:t>3/16/2026</a:t>
             </a:fld>
             <a:endParaRPr lang="en-US" dirty="0"/>
           </a:p>
@@ -1552,7 +1552,7 @@
           <a:p>
             <a:fld id="{2A4BF121-2723-4D35-ADA9-215CD054C4BC}" type="datetimeFigureOut">
               <a:rPr lang="en-US" dirty="0"/>
-              <a:t>3/15/2026</a:t>
+              <a:t>3/16/2026</a:t>
             </a:fld>
             <a:endParaRPr lang="en-US" dirty="0"/>
           </a:p>
@@ -1836,7 +1836,7 @@
           <a:p>
             <a:fld id="{C54F54BA-4BC6-480F-839C-951A49B248A9}" type="datetimeFigureOut">
               <a:rPr lang="en-US" dirty="0"/>
-              <a:t>3/15/2026</a:t>
+              <a:t>3/16/2026</a:t>
             </a:fld>
             <a:endParaRPr lang="en-US" dirty="0"/>
           </a:p>
@@ -2115,7 +2115,7 @@
           <a:p>
             <a:fld id="{0F9DD0EA-4726-4440-BF9D-E88296FC3068}" type="datetimeFigureOut">
               <a:rPr lang="en-US" dirty="0"/>
-              <a:t>3/15/2026</a:t>
+              <a:t>3/16/2026</a:t>
             </a:fld>
             <a:endParaRPr lang="en-US" dirty="0"/>
           </a:p>
@@ -2544,7 +2544,7 @@
           <a:p>
             <a:fld id="{19CAD10D-99D1-46B2-A85A-C16850FCF8CF}" type="datetimeFigureOut">
               <a:rPr lang="en-US" dirty="0"/>
-              <a:t>3/15/2026</a:t>
+              <a:t>3/16/2026</a:t>
             </a:fld>
             <a:endParaRPr lang="en-US" dirty="0"/>
           </a:p>
@@ -2689,7 +2689,7 @@
           <a:p>
             <a:fld id="{48C67E51-34D6-4E3D-8F41-CC63EA446EDD}" type="datetimeFigureOut">
               <a:rPr lang="en-US" dirty="0"/>
-              <a:t>3/15/2026</a:t>
+              <a:t>3/16/2026</a:t>
             </a:fld>
             <a:endParaRPr lang="en-US" dirty="0"/>
           </a:p>
@@ -2806,7 +2806,7 @@
           <a:p>
             <a:fld id="{8D49E550-CE3F-497F-B953-7DE0932F91C0}" type="datetimeFigureOut">
               <a:rPr lang="en-US" dirty="0"/>
-              <a:t>3/15/2026</a:t>
+              <a:t>3/16/2026</a:t>
             </a:fld>
             <a:endParaRPr lang="en-US" dirty="0"/>
           </a:p>
@@ -3121,7 +3121,7 @@
           <a:p>
             <a:fld id="{217A0BF4-BAA0-4539-95F2-9C4277F97478}" type="datetimeFigureOut">
               <a:rPr lang="en-US" dirty="0"/>
-              <a:t>3/15/2026</a:t>
+              <a:t>3/16/2026</a:t>
             </a:fld>
             <a:endParaRPr lang="en-US" dirty="0"/>
           </a:p>
@@ -3418,7 +3418,7 @@
           <a:p>
             <a:fld id="{52E9884E-D945-496C-84BE-49C61F78F9EC}" type="datetimeFigureOut">
               <a:rPr lang="en-US" dirty="0"/>
-              <a:t>3/15/2026</a:t>
+              <a:t>3/16/2026</a:t>
             </a:fld>
             <a:endParaRPr lang="en-US" dirty="0"/>
           </a:p>
@@ -3667,7 +3667,7 @@
           <a:p>
             <a:fld id="{CD438618-DEE5-47CF-A8B2-A9E090D503CD}" type="datetimeFigureOut">
               <a:rPr lang="en-US" dirty="0"/>
-              <a:t>3/15/2026</a:t>
+              <a:t>3/16/2026</a:t>
             </a:fld>
             <a:endParaRPr lang="en-US" dirty="0"/>
           </a:p>
@@ -4255,12 +4255,24 @@
           <a:lstStyle/>
           <a:p>
             <a:r>
-              <a:rPr lang="hu-HU" sz="8000">
+              <a:rPr lang="hu-HU" sz="8000" dirty="0">
                 <a:cs typeface="Arial"/>
               </a:rPr>
-              <a:t>BlackJack Winform Projekt</a:t>
-            </a:r>
-            <a:endParaRPr lang="hu-HU" sz="8000"/>
+              <a:t>BlackJack </a:t>
+            </a:r>
+            <a:r>
+              <a:rPr lang="hu-HU" sz="8000" dirty="0" err="1">
+                <a:cs typeface="Arial"/>
+              </a:rPr>
+              <a:t>Winform</a:t>
+            </a:r>
+            <a:r>
+              <a:rPr lang="hu-HU" sz="8000" dirty="0">
+                <a:cs typeface="Arial"/>
+              </a:rPr>
+              <a:t> Projekt</a:t>
+            </a:r>
+            <a:endParaRPr lang="hu-HU" sz="8000" dirty="0"/>
           </a:p>
         </p:txBody>
       </p:sp>
@@ -4352,8 +4364,16 @@
           <a:lstStyle/>
           <a:p>
             <a:r>
-              <a:rPr lang="hu-HU"/>
-              <a:t>Design felépitése </a:t>
+              <a:rPr lang="hu-HU" dirty="0"/>
+              <a:t>Design </a:t>
+            </a:r>
+            <a:r>
+              <a:rPr lang="hu-HU" dirty="0" err="1"/>
+              <a:t>felépitése</a:t>
+            </a:r>
+            <a:r>
+              <a:rPr lang="hu-HU" dirty="0"/>
+              <a:t> </a:t>
             </a:r>
           </a:p>
         </p:txBody>
@@ -4412,7 +4432,7 @@
           <a:lstStyle/>
           <a:p>
             <a:fld id="{78083B2D-12D1-4E53-872C-D91F4812F648}" type="datetime1">
-              <a:t>2026. 03. 15.</a:t>
+              <a:t>2026. 03. 16.</a:t>
             </a:fld>
             <a:endParaRPr lang="en-US" dirty="0"/>
           </a:p>
@@ -4508,9 +4528,18 @@
           <a:lstStyle/>
           <a:p>
             <a:r>
-              <a:rPr lang="hu-HU"/>
-              <a:t>Informácio a Lapokrol</a:t>
-            </a:r>
+              <a:rPr lang="hu-HU" dirty="0" err="1"/>
+              <a:t>Informácio</a:t>
+            </a:r>
+            <a:r>
+              <a:rPr lang="hu-HU" dirty="0"/>
+              <a:t> a </a:t>
+            </a:r>
+            <a:r>
+              <a:rPr lang="hu-HU" dirty="0" err="1"/>
+              <a:t>Lapokrol</a:t>
+            </a:r>
+            <a:endParaRPr lang="hu-HU" dirty="0"/>
           </a:p>
         </p:txBody>
       </p:sp>
@@ -4547,13 +4576,8 @@
           <a:p>
             <a:r>
               <a:rPr lang="hu-HU" dirty="0"/>
-              <a:t>A játékhoz használt Gombok illetve az </a:t>
-            </a:r>
-            <a:r>
-              <a:rPr lang="hu-HU"/>
-              <a:t>eredmény kiíró szöveg</a:t>
-            </a:r>
-            <a:endParaRPr lang="hu-HU" dirty="0"/>
+              <a:t>A játékhoz használt Gombok illetve az eredmény kiíró szöveg</a:t>
+            </a:r>
           </a:p>
         </p:txBody>
       </p:sp>
@@ -4709,8 +4733,16 @@
           <a:lstStyle/>
           <a:p>
             <a:r>
-              <a:rPr lang="hu-HU"/>
-              <a:t>A játékos és a dealer kártyái</a:t>
+              <a:rPr lang="hu-HU" dirty="0"/>
+              <a:t>A játékos és a </a:t>
+            </a:r>
+            <a:r>
+              <a:rPr lang="hu-HU" dirty="0" err="1"/>
+              <a:t>dealer</a:t>
+            </a:r>
+            <a:r>
+              <a:rPr lang="hu-HU" dirty="0"/>
+              <a:t> kártyái</a:t>
             </a:r>
           </a:p>
         </p:txBody>
@@ -4788,11 +4820,7 @@
           <a:p>
             <a:r>
               <a:rPr lang="hu-HU" dirty="0"/>
-              <a:t>A Tét megrakásához </a:t>
-            </a:r>
-            <a:r>
-              <a:rPr lang="hu-HU"/>
-              <a:t>használható mező </a:t>
+              <a:t>A Tét megrakásához használható mező </a:t>
             </a:r>
           </a:p>
         </p:txBody>
@@ -4828,7 +4856,7 @@
                             </p:stCondLst>
                             <p:childTnLst>
                               <p:par>
-                                <p:cTn id="5" presetID="1" presetClass="exit" presetSubtype="0" fill="hold" nodeType="clickEffect">
+                                <p:cTn id="5" presetID="1" presetClass="entr" presetSubtype="0" fill="hold" nodeType="clickEffect">
                                   <p:stCondLst>
                                     <p:cond delay="0"/>
                                   </p:stCondLst>
@@ -4848,14 +4876,14 @@
                                         </p:attrNameLst>
                                       </p:cBhvr>
                                       <p:to>
-                                        <p:strVal val="hidden"/>
+                                        <p:strVal val="visible"/>
                                       </p:to>
                                     </p:set>
                                   </p:childTnLst>
                                 </p:cTn>
                               </p:par>
                               <p:par>
-                                <p:cTn id="7" presetID="1" presetClass="exit" presetSubtype="0" fill="hold" grpId="0" nodeType="withEffect">
+                                <p:cTn id="7" presetID="1" presetClass="entr" presetSubtype="0" fill="hold" grpId="0" nodeType="withEffect">
                                   <p:stCondLst>
                                     <p:cond delay="0"/>
                                   </p:stCondLst>
@@ -4875,7 +4903,7 @@
                                         </p:attrNameLst>
                                       </p:cBhvr>
                                       <p:to>
-                                        <p:strVal val="hidden"/>
+                                        <p:strVal val="visible"/>
                                       </p:to>
                                     </p:set>
                                   </p:childTnLst>
@@ -5201,7 +5229,7 @@
           <a:lstStyle/>
           <a:p>
             <a:fld id="{4AF0DB81-F4B1-42DE-A732-F49E24964CDB}" type="datetime1">
-              <a:t>3/15/2026</a:t>
+              <a:t>2026. 03. 16.</a:t>
             </a:fld>
             <a:endParaRPr lang="en-US" dirty="0"/>
           </a:p>
@@ -5469,7 +5497,7 @@
           <a:lstStyle/>
           <a:p>
             <a:fld id="{14CC2DB6-D547-492B-B44C-3979128F69BB}" type="datetime1">
-              <a:t>3/15/2026</a:t>
+              <a:t>2026. 03. 16.</a:t>
             </a:fld>
             <a:endParaRPr lang="en-US" dirty="0"/>
           </a:p>
@@ -5719,7 +5747,7 @@
           <a:lstStyle/>
           <a:p>
             <a:fld id="{BF182150-0624-4EC4-A1D6-A7FA2E364285}" type="datetime1">
-              <a:t>3/15/2026</a:t>
+              <a:t>2026. 03. 16.</a:t>
             </a:fld>
             <a:endParaRPr lang="en-US" dirty="0"/>
           </a:p>
@@ -5990,7 +6018,7 @@
           <a:lstStyle/>
           <a:p>
             <a:fld id="{0BE1B6D0-8A87-4D8B-BACD-DB8973C52F9D}" type="datetime1">
-              <a:t>3/15/2026</a:t>
+              <a:t>2026. 03. 16.</a:t>
             </a:fld>
             <a:endParaRPr lang="en-US" dirty="0"/>
           </a:p>
@@ -6208,7 +6236,7 @@
           <a:lstStyle/>
           <a:p>
             <a:fld id="{6858F8B2-E68B-40DB-8629-477604CDA360}" type="datetime1">
-              <a:t>3/15/2026</a:t>
+              <a:t>2026. 03. 16.</a:t>
             </a:fld>
             <a:endParaRPr lang="en-US" dirty="0"/>
           </a:p>
@@ -7203,25 +7231,6 @@
 </file>
 
 <file path=customXml/item2.xml><?xml version="1.0" encoding="utf-8"?>
-<p:properties xmlns:p="http://schemas.microsoft.com/office/2006/metadata/properties" xmlns:xsi="http://www.w3.org/2001/XMLSchema-instance" xmlns:pc="http://schemas.microsoft.com/office/infopath/2007/PartnerControls">
-  <documentManagement>
-    <_ip_UnifiedCompliancePolicyUIAction xmlns="http://schemas.microsoft.com/sharepoint/v3" xsi:nil="true"/>
-    <Image xmlns="71af3243-3dd4-4a8d-8c0d-dd76da1f02a5">
-      <Url xsi:nil="true"/>
-      <Description xsi:nil="true"/>
-    </Image>
-    <Status xmlns="71af3243-3dd4-4a8d-8c0d-dd76da1f02a5">Not started</Status>
-    <_ip_UnifiedCompliancePolicyProperties xmlns="http://schemas.microsoft.com/sharepoint/v3" xsi:nil="true"/>
-    <ImageTagsTaxHTField xmlns="71af3243-3dd4-4a8d-8c0d-dd76da1f02a5">
-      <Terms xmlns="http://schemas.microsoft.com/office/infopath/2007/PartnerControls"/>
-    </ImageTagsTaxHTField>
-    <TaxCatchAll xmlns="230e9df3-be65-4c73-a93b-d1236ebd677e"/>
-    <MediaServiceKeyPoints xmlns="71af3243-3dd4-4a8d-8c0d-dd76da1f02a5" xsi:nil="true"/>
-  </documentManagement>
-</p:properties>
-</file>
-
-<file path=customXml/item3.xml><?xml version="1.0" encoding="utf-8"?>
 <ct:contentTypeSchema xmlns:ct="http://schemas.microsoft.com/office/2006/metadata/contentType" xmlns:ma="http://schemas.microsoft.com/office/2006/metadata/properties/metaAttributes" ct:_="" ma:_="" ma:contentTypeName="Document" ma:contentTypeID="0x01010079F111ED35F8CC479449609E8A0923A6" ma:contentTypeVersion="20" ma:contentTypeDescription="Create a new document." ma:contentTypeScope="" ma:versionID="1267097ee5f5874adfcc408041ae252e">
   <xsd:schema xmlns:xsd="http://www.w3.org/2001/XMLSchema" xmlns:xs="http://www.w3.org/2001/XMLSchema" xmlns:p="http://schemas.microsoft.com/office/2006/metadata/properties" xmlns:ns1="http://schemas.microsoft.com/sharepoint/v3" xmlns:ns2="71af3243-3dd4-4a8d-8c0d-dd76da1f02a5" xmlns:ns3="16c05727-aa75-4e4a-9b5f-8a80a1165891" xmlns:ns4="230e9df3-be65-4c73-a93b-d1236ebd677e" targetNamespace="http://schemas.microsoft.com/office/2006/metadata/properties" ma:root="true" ma:fieldsID="395891a93df65b14727750f2c06c306c" ns1:_="" ns2:_="" ns3:_="" ns4:_="">
     <xsd:import namespace="http://schemas.microsoft.com/sharepoint/v3"/>
@@ -7497,6 +7506,25 @@
 </ct:contentTypeSchema>
 </file>
 
+<file path=customXml/item3.xml><?xml version="1.0" encoding="utf-8"?>
+<p:properties xmlns:p="http://schemas.microsoft.com/office/2006/metadata/properties" xmlns:xsi="http://www.w3.org/2001/XMLSchema-instance" xmlns:pc="http://schemas.microsoft.com/office/infopath/2007/PartnerControls">
+  <documentManagement>
+    <_ip_UnifiedCompliancePolicyUIAction xmlns="http://schemas.microsoft.com/sharepoint/v3" xsi:nil="true"/>
+    <Image xmlns="71af3243-3dd4-4a8d-8c0d-dd76da1f02a5">
+      <Url xsi:nil="true"/>
+      <Description xsi:nil="true"/>
+    </Image>
+    <Status xmlns="71af3243-3dd4-4a8d-8c0d-dd76da1f02a5">Not started</Status>
+    <_ip_UnifiedCompliancePolicyProperties xmlns="http://schemas.microsoft.com/sharepoint/v3" xsi:nil="true"/>
+    <ImageTagsTaxHTField xmlns="71af3243-3dd4-4a8d-8c0d-dd76da1f02a5">
+      <Terms xmlns="http://schemas.microsoft.com/office/infopath/2007/PartnerControls"/>
+    </ImageTagsTaxHTField>
+    <TaxCatchAll xmlns="230e9df3-be65-4c73-a93b-d1236ebd677e"/>
+    <MediaServiceKeyPoints xmlns="71af3243-3dd4-4a8d-8c0d-dd76da1f02a5" xsi:nil="true"/>
+  </documentManagement>
+</p:properties>
+</file>
+
 <file path=customXml/itemProps1.xml><?xml version="1.0" encoding="utf-8"?>
 <ds:datastoreItem xmlns:ds="http://schemas.openxmlformats.org/officeDocument/2006/customXml" ds:itemID="{350455F8-10A0-4EEF-9BB1-9035E295B165}">
   <ds:schemaRefs>
@@ -7506,18 +7534,6 @@
 </file>
 
 <file path=customXml/itemProps2.xml><?xml version="1.0" encoding="utf-8"?>
-<ds:datastoreItem xmlns:ds="http://schemas.openxmlformats.org/officeDocument/2006/customXml" ds:itemID="{79B0F2AC-8567-4D03-BFFC-653DB596C528}">
-  <ds:schemaRefs>
-    <ds:schemaRef ds:uri="http://schemas.microsoft.com/office/2006/metadata/properties"/>
-    <ds:schemaRef ds:uri="http://schemas.microsoft.com/office/infopath/2007/PartnerControls"/>
-    <ds:schemaRef ds:uri="http://schemas.microsoft.com/sharepoint/v3"/>
-    <ds:schemaRef ds:uri="71af3243-3dd4-4a8d-8c0d-dd76da1f02a5"/>
-    <ds:schemaRef ds:uri="230e9df3-be65-4c73-a93b-d1236ebd677e"/>
-  </ds:schemaRefs>
-</ds:datastoreItem>
-</file>
-
-<file path=customXml/itemProps3.xml><?xml version="1.0" encoding="utf-8"?>
 <ds:datastoreItem xmlns:ds="http://schemas.openxmlformats.org/officeDocument/2006/customXml" ds:itemID="{7C2F7BF6-CD39-4568-B8BD-EA8D252E100B}">
   <ds:schemaRefs>
     <ds:schemaRef ds:uri="http://schemas.microsoft.com/office/2006/metadata/contentType"/>
@@ -7536,4 +7552,16 @@
     <ds:schemaRef ds:uri="http://schemas.microsoft.com/internal/obd"/>
   </ds:schemaRefs>
 </ds:datastoreItem>
+</file>
+
+<file path=customXml/itemProps3.xml><?xml version="1.0" encoding="utf-8"?>
+<ds:datastoreItem xmlns:ds="http://schemas.openxmlformats.org/officeDocument/2006/customXml" ds:itemID="{79B0F2AC-8567-4D03-BFFC-653DB596C528}">
+  <ds:schemaRefs>
+    <ds:schemaRef ds:uri="http://schemas.microsoft.com/office/2006/metadata/properties"/>
+    <ds:schemaRef ds:uri="http://schemas.microsoft.com/office/infopath/2007/PartnerControls"/>
+    <ds:schemaRef ds:uri="http://schemas.microsoft.com/sharepoint/v3"/>
+    <ds:schemaRef ds:uri="71af3243-3dd4-4a8d-8c0d-dd76da1f02a5"/>
+    <ds:schemaRef ds:uri="230e9df3-be65-4c73-a93b-d1236ebd677e"/>
+  </ds:schemaRefs>
+</ds:datastoreItem>
 </file>